--- a/morning-registration-activities/form-time-quiz/downloads/Form_Time_Quiz_Year_10_and_11.pptx
+++ b/morning-registration-activities/form-time-quiz/downloads/Form_Time_Quiz_Year_10_and_11.pptx
@@ -12028,7 +12028,7 @@
                 </a:solidFill>
                 <a:latin typeface="Karla"/>
               </a:rPr>
-              <a:t>Volume Two is coming soon to thepastoralguide.com.</a:t>
+              <a:t>Volume Two is available now at thepastoralguide.com.</a:t>
             </a:r>
           </a:p>
         </p:txBody>

--- a/morning-registration-activities/form-time-quiz/downloads/Form_Time_Quiz_Year_10_and_11.pptx
+++ b/morning-registration-activities/form-time-quiz/downloads/Form_Time_Quiz_Year_10_and_11.pptx
@@ -3193,7 +3193,7 @@
                 <a:solidFill>
                   <a:srgbClr val="974F16"/>
                 </a:solidFill>
-                <a:latin typeface="Karla"/>
+                <a:latin typeface="Calibri"/>
               </a:rPr>
               <a:t>MORNING REGISTRATION ACTIVITIES</a:t>
             </a:r>
@@ -3231,11 +3231,11 @@
               </a:spcAft>
             </a:pPr>
             <a:r>
-              <a:rPr sz="3000" b="1" i="0">
+              <a:rPr sz="3000" b="0" i="0">
                 <a:solidFill>
                   <a:srgbClr val="974F16"/>
                 </a:solidFill>
-                <a:latin typeface="Libre Caslon Display"/>
+                <a:latin typeface="Georgia"/>
               </a:rPr>
               <a:t>The Form Time Quiz</a:t>
             </a:r>
@@ -3290,7 +3290,7 @@
                 <a:solidFill>
                   <a:srgbClr val="FFFDF7"/>
                 </a:solidFill>
-                <a:latin typeface="Karla"/>
+                <a:latin typeface="Calibri"/>
               </a:rPr>
               <a:t>VOLUME ONE  ·  YEAR 10 AND 11</a:t>
             </a:r>
@@ -3332,7 +3332,7 @@
                 <a:solidFill>
                   <a:srgbClr val="5C6552"/>
                 </a:solidFill>
-                <a:latin typeface="Karla"/>
+                <a:latin typeface="Calibri"/>
               </a:rPr>
               <a:t>Ten questions: six on how revision works, then four of general knowledge.</a:t>
             </a:r>
@@ -3482,11 +3482,11 @@
               </a:spcAft>
             </a:pPr>
             <a:r>
-              <a:rPr sz="1350" b="1" i="0">
+              <a:rPr sz="1350" b="0" i="0">
                 <a:solidFill>
                   <a:srgbClr val="974F16"/>
                 </a:solidFill>
-                <a:latin typeface="Libre Caslon Display"/>
+                <a:latin typeface="Georgia"/>
               </a:rPr>
               <a:t>Get into teams</a:t>
             </a:r>
@@ -3528,7 +3528,7 @@
                 <a:solidFill>
                   <a:srgbClr val="5C6552"/>
                 </a:solidFill>
-                <a:latin typeface="Karla"/>
+                <a:latin typeface="Calibri"/>
               </a:rPr>
               <a:t>Three or four to a team, with one answer sheet between you.</a:t>
             </a:r>
@@ -3678,11 +3678,11 @@
               </a:spcAft>
             </a:pPr>
             <a:r>
-              <a:rPr sz="1350" b="1" i="0">
+              <a:rPr sz="1350" b="0" i="0">
                 <a:solidFill>
                   <a:srgbClr val="974F16"/>
                 </a:solidFill>
-                <a:latin typeface="Libre Caslon Display"/>
+                <a:latin typeface="Georgia"/>
               </a:rPr>
               <a:t>Answer together</a:t>
             </a:r>
@@ -3724,7 +3724,7 @@
                 <a:solidFill>
                   <a:srgbClr val="5C6552"/>
                 </a:solidFill>
-                <a:latin typeface="Karla"/>
+                <a:latin typeface="Calibri"/>
               </a:rPr>
               <a:t>Each question goes up on the board. Agree an answer, then write it down.</a:t>
             </a:r>
@@ -3874,11 +3874,11 @@
               </a:spcAft>
             </a:pPr>
             <a:r>
-              <a:rPr sz="1350" b="1" i="0">
+              <a:rPr sz="1350" b="0" i="0">
                 <a:solidFill>
                   <a:srgbClr val="974F16"/>
                 </a:solidFill>
-                <a:latin typeface="Libre Caslon Display"/>
+                <a:latin typeface="Georgia"/>
               </a:rPr>
               <a:t>Swap and mark</a:t>
             </a:r>
@@ -3920,7 +3920,7 @@
                 <a:solidFill>
                   <a:srgbClr val="5C6552"/>
                 </a:solidFill>
-                <a:latin typeface="Karla"/>
+                <a:latin typeface="Calibri"/>
               </a:rPr>
               <a:t>Swap sheets with the team next to you, then the answers go up one at a time.</a:t>
             </a:r>
@@ -3962,7 +3962,7 @@
                 <a:solidFill>
                   <a:srgbClr val="8B9179"/>
                 </a:solidFill>
-                <a:latin typeface="Karla"/>
+                <a:latin typeface="Calibri"/>
               </a:rPr>
               <a:t>Needs: one answer sheet per team, from the resource pack.</a:t>
             </a:r>
@@ -4028,7 +4028,7 @@
                 <a:solidFill>
                   <a:srgbClr val="8B9179"/>
                 </a:solidFill>
-                <a:latin typeface="Karla"/>
+                <a:latin typeface="Calibri"/>
               </a:rPr>
               <a:t>The Pastoral Guide</a:t>
             </a:r>
@@ -4070,7 +4070,7 @@
                 <a:solidFill>
                   <a:srgbClr val="8B9179"/>
                 </a:solidFill>
-                <a:latin typeface="Karla"/>
+                <a:latin typeface="Calibri"/>
               </a:rPr>
               <a:t>1 / 27</a:t>
             </a:r>
@@ -4174,7 +4174,7 @@
                 <a:solidFill>
                   <a:srgbClr val="974F16"/>
                 </a:solidFill>
-                <a:latin typeface="Karla"/>
+                <a:latin typeface="Calibri"/>
               </a:rPr>
               <a:t>THE FORM TIME QUIZ  ·  ROUND TWO  ·  QUESTION 7 OF 10</a:t>
             </a:r>
@@ -4350,7 +4350,7 @@
                 <a:solidFill>
                   <a:srgbClr val="FFFDF7"/>
                 </a:solidFill>
-                <a:latin typeface="Karla"/>
+                <a:latin typeface="Calibri"/>
               </a:rPr>
               <a:t>7</a:t>
             </a:r>
@@ -4388,11 +4388,11 @@
               </a:spcAft>
             </a:pPr>
             <a:r>
-              <a:rPr sz="2400" b="1" i="0">
+              <a:rPr sz="2400" b="0" i="0">
                 <a:solidFill>
                   <a:srgbClr val="974F16"/>
                 </a:solidFill>
-                <a:latin typeface="Libre Caslon Display"/>
+                <a:latin typeface="Georgia"/>
               </a:rPr>
               <a:t>What is the chemical symbol for gold?</a:t>
             </a:r>
@@ -4478,7 +4478,7 @@
                 <a:solidFill>
                   <a:srgbClr val="8B9179"/>
                 </a:solidFill>
-                <a:latin typeface="Karla"/>
+                <a:latin typeface="Calibri"/>
               </a:rPr>
               <a:t>Agree it as a team, then write it on the sheet.</a:t>
             </a:r>
@@ -4544,7 +4544,7 @@
                 <a:solidFill>
                   <a:srgbClr val="8B9179"/>
                 </a:solidFill>
-                <a:latin typeface="Karla"/>
+                <a:latin typeface="Calibri"/>
               </a:rPr>
               <a:t>The Pastoral Guide</a:t>
             </a:r>
@@ -4586,7 +4586,7 @@
                 <a:solidFill>
                   <a:srgbClr val="8B9179"/>
                 </a:solidFill>
-                <a:latin typeface="Karla"/>
+                <a:latin typeface="Calibri"/>
               </a:rPr>
               <a:t>10 / 27</a:t>
             </a:r>
@@ -4690,7 +4690,7 @@
                 <a:solidFill>
                   <a:srgbClr val="974F16"/>
                 </a:solidFill>
-                <a:latin typeface="Karla"/>
+                <a:latin typeface="Calibri"/>
               </a:rPr>
               <a:t>THE FORM TIME QUIZ  ·  ROUND TWO  ·  QUESTION 8 OF 10</a:t>
             </a:r>
@@ -4866,7 +4866,7 @@
                 <a:solidFill>
                   <a:srgbClr val="FFFDF7"/>
                 </a:solidFill>
-                <a:latin typeface="Karla"/>
+                <a:latin typeface="Calibri"/>
               </a:rPr>
               <a:t>8</a:t>
             </a:r>
@@ -4904,11 +4904,11 @@
               </a:spcAft>
             </a:pPr>
             <a:r>
-              <a:rPr sz="2400" b="1" i="0">
+              <a:rPr sz="2400" b="0" i="0">
                 <a:solidFill>
                   <a:srgbClr val="974F16"/>
                 </a:solidFill>
-                <a:latin typeface="Libre Caslon Display"/>
+                <a:latin typeface="Georgia"/>
               </a:rPr>
               <a:t>Which is the longest river in Africa?</a:t>
             </a:r>
@@ -4994,7 +4994,7 @@
                 <a:solidFill>
                   <a:srgbClr val="8B9179"/>
                 </a:solidFill>
-                <a:latin typeface="Karla"/>
+                <a:latin typeface="Calibri"/>
               </a:rPr>
               <a:t>Agree it as a team, then write it on the sheet.</a:t>
             </a:r>
@@ -5060,7 +5060,7 @@
                 <a:solidFill>
                   <a:srgbClr val="8B9179"/>
                 </a:solidFill>
-                <a:latin typeface="Karla"/>
+                <a:latin typeface="Calibri"/>
               </a:rPr>
               <a:t>The Pastoral Guide</a:t>
             </a:r>
@@ -5102,7 +5102,7 @@
                 <a:solidFill>
                   <a:srgbClr val="8B9179"/>
                 </a:solidFill>
-                <a:latin typeface="Karla"/>
+                <a:latin typeface="Calibri"/>
               </a:rPr>
               <a:t>11 / 27</a:t>
             </a:r>
@@ -5206,7 +5206,7 @@
                 <a:solidFill>
                   <a:srgbClr val="974F16"/>
                 </a:solidFill>
-                <a:latin typeface="Karla"/>
+                <a:latin typeface="Calibri"/>
               </a:rPr>
               <a:t>THE FORM TIME QUIZ  ·  ROUND TWO  ·  QUESTION 9 OF 10</a:t>
             </a:r>
@@ -5382,7 +5382,7 @@
                 <a:solidFill>
                   <a:srgbClr val="FFFDF7"/>
                 </a:solidFill>
-                <a:latin typeface="Karla"/>
+                <a:latin typeface="Calibri"/>
               </a:rPr>
               <a:t>9</a:t>
             </a:r>
@@ -5420,11 +5420,11 @@
               </a:spcAft>
             </a:pPr>
             <a:r>
-              <a:rPr sz="2400" b="1" i="0">
+              <a:rPr sz="2400" b="0" i="0">
                 <a:solidFill>
                   <a:srgbClr val="974F16"/>
                 </a:solidFill>
-                <a:latin typeface="Libre Caslon Display"/>
+                <a:latin typeface="Georgia"/>
               </a:rPr>
               <a:t>How many bones are there in an adult human body?</a:t>
             </a:r>
@@ -5466,7 +5466,7 @@
                 <a:solidFill>
                   <a:srgbClr val="8B9179"/>
                 </a:solidFill>
-                <a:latin typeface="Karla"/>
+                <a:latin typeface="Calibri"/>
               </a:rPr>
               <a:t>ONE OF THESE</a:t>
             </a:r>
@@ -5642,7 +5642,7 @@
                 <a:solidFill>
                   <a:srgbClr val="FFFDF7"/>
                 </a:solidFill>
-                <a:latin typeface="Karla"/>
+                <a:latin typeface="Calibri"/>
               </a:rPr>
               <a:t>A</a:t>
             </a:r>
@@ -5684,7 +5684,7 @@
                 <a:solidFill>
                   <a:srgbClr val="2E3436"/>
                 </a:solidFill>
-                <a:latin typeface="Karla"/>
+                <a:latin typeface="Calibri"/>
               </a:rPr>
               <a:t>106</a:t>
             </a:r>
@@ -5860,7 +5860,7 @@
                 <a:solidFill>
                   <a:srgbClr val="FFFDF7"/>
                 </a:solidFill>
-                <a:latin typeface="Karla"/>
+                <a:latin typeface="Calibri"/>
               </a:rPr>
               <a:t>B</a:t>
             </a:r>
@@ -5902,7 +5902,7 @@
                 <a:solidFill>
                   <a:srgbClr val="2E3436"/>
                 </a:solidFill>
-                <a:latin typeface="Karla"/>
+                <a:latin typeface="Calibri"/>
               </a:rPr>
               <a:t>206</a:t>
             </a:r>
@@ -6078,7 +6078,7 @@
                 <a:solidFill>
                   <a:srgbClr val="FFFDF7"/>
                 </a:solidFill>
-                <a:latin typeface="Karla"/>
+                <a:latin typeface="Calibri"/>
               </a:rPr>
               <a:t>C</a:t>
             </a:r>
@@ -6120,7 +6120,7 @@
                 <a:solidFill>
                   <a:srgbClr val="2E3436"/>
                 </a:solidFill>
-                <a:latin typeface="Karla"/>
+                <a:latin typeface="Calibri"/>
               </a:rPr>
               <a:t>306</a:t>
             </a:r>
@@ -6162,7 +6162,7 @@
                 <a:solidFill>
                   <a:srgbClr val="5C6552"/>
                 </a:solidFill>
-                <a:latin typeface="Karla"/>
+                <a:latin typeface="Calibri"/>
               </a:rPr>
               <a:t>Agree it as a team, then tick it on the sheet.</a:t>
             </a:r>
@@ -6228,7 +6228,7 @@
                 <a:solidFill>
                   <a:srgbClr val="8B9179"/>
                 </a:solidFill>
-                <a:latin typeface="Karla"/>
+                <a:latin typeface="Calibri"/>
               </a:rPr>
               <a:t>The Pastoral Guide</a:t>
             </a:r>
@@ -6270,7 +6270,7 @@
                 <a:solidFill>
                   <a:srgbClr val="8B9179"/>
                 </a:solidFill>
-                <a:latin typeface="Karla"/>
+                <a:latin typeface="Calibri"/>
               </a:rPr>
               <a:t>12 / 27</a:t>
             </a:r>
@@ -6374,7 +6374,7 @@
                 <a:solidFill>
                   <a:srgbClr val="974F16"/>
                 </a:solidFill>
-                <a:latin typeface="Karla"/>
+                <a:latin typeface="Calibri"/>
               </a:rPr>
               <a:t>THE FORM TIME QUIZ  ·  ROUND TWO  ·  QUESTION 10 OF 10</a:t>
             </a:r>
@@ -6550,7 +6550,7 @@
                 <a:solidFill>
                   <a:srgbClr val="FFFDF7"/>
                 </a:solidFill>
-                <a:latin typeface="Karla"/>
+                <a:latin typeface="Calibri"/>
               </a:rPr>
               <a:t>10</a:t>
             </a:r>
@@ -6588,11 +6588,11 @@
               </a:spcAft>
             </a:pPr>
             <a:r>
-              <a:rPr sz="2400" b="1" i="0">
+              <a:rPr sz="2400" b="0" i="0">
                 <a:solidFill>
                   <a:srgbClr val="974F16"/>
                 </a:solidFill>
-                <a:latin typeface="Libre Caslon Display"/>
+                <a:latin typeface="Georgia"/>
               </a:rPr>
               <a:t>Which country’s flag has a red maple leaf on it?</a:t>
             </a:r>
@@ -6678,7 +6678,7 @@
                 <a:solidFill>
                   <a:srgbClr val="8B9179"/>
                 </a:solidFill>
-                <a:latin typeface="Karla"/>
+                <a:latin typeface="Calibri"/>
               </a:rPr>
               <a:t>Agree it as a team, then write it on the sheet.</a:t>
             </a:r>
@@ -6744,7 +6744,7 @@
                 <a:solidFill>
                   <a:srgbClr val="8B9179"/>
                 </a:solidFill>
-                <a:latin typeface="Karla"/>
+                <a:latin typeface="Calibri"/>
               </a:rPr>
               <a:t>The Pastoral Guide</a:t>
             </a:r>
@@ -6786,7 +6786,7 @@
                 <a:solidFill>
                   <a:srgbClr val="8B9179"/>
                 </a:solidFill>
-                <a:latin typeface="Karla"/>
+                <a:latin typeface="Calibri"/>
               </a:rPr>
               <a:t>13 / 27</a:t>
             </a:r>
@@ -6903,7 +6903,7 @@
                 <a:solidFill>
                   <a:srgbClr val="974F16"/>
                 </a:solidFill>
-                <a:latin typeface="Karla"/>
+                <a:latin typeface="Calibri"/>
               </a:rPr>
               <a:t>ANSWERS</a:t>
             </a:r>
@@ -6941,11 +6941,11 @@
               </a:spcAft>
             </a:pPr>
             <a:r>
-              <a:rPr sz="4000" b="1" i="0">
+              <a:rPr sz="4000" b="0" i="0">
                 <a:solidFill>
                   <a:srgbClr val="FFFDF7"/>
                 </a:solidFill>
-                <a:latin typeface="Libre Caslon Display"/>
+                <a:latin typeface="Georgia"/>
               </a:rPr>
               <a:t>Swap sheets</a:t>
             </a:r>
@@ -7031,7 +7031,7 @@
                 <a:solidFill>
                   <a:srgbClr val="EBCDAE"/>
                 </a:solidFill>
-                <a:latin typeface="Karla"/>
+                <a:latin typeface="Calibri"/>
               </a:rPr>
               <a:t>Swap with the team next to you. Give one mark for each right answer, then add up the score out of ten.</a:t>
             </a:r>
@@ -7097,7 +7097,7 @@
                 <a:solidFill>
                   <a:srgbClr val="EBCDAE"/>
                 </a:solidFill>
-                <a:latin typeface="Karla"/>
+                <a:latin typeface="Calibri"/>
               </a:rPr>
               <a:t>The Pastoral Guide</a:t>
             </a:r>
@@ -7139,7 +7139,7 @@
                 <a:solidFill>
                   <a:srgbClr val="EBCDAE"/>
                 </a:solidFill>
-                <a:latin typeface="Karla"/>
+                <a:latin typeface="Calibri"/>
               </a:rPr>
               <a:t>14 / 27</a:t>
             </a:r>
@@ -7243,7 +7243,7 @@
                 <a:solidFill>
                   <a:srgbClr val="974F16"/>
                 </a:solidFill>
-                <a:latin typeface="Karla"/>
+                <a:latin typeface="Calibri"/>
               </a:rPr>
               <a:t>THE FORM TIME QUIZ  ·  ANSWERS  ·  QUESTION 1</a:t>
             </a:r>
@@ -7285,7 +7285,7 @@
                 <a:solidFill>
                   <a:srgbClr val="5C6552"/>
                 </a:solidFill>
-                <a:latin typeface="Karla"/>
+                <a:latin typeface="Calibri"/>
               </a:rPr>
               <a:t>Reading your notes again and again is one of the best ways to revise.</a:t>
             </a:r>
@@ -7323,11 +7323,11 @@
               </a:spcAft>
             </a:pPr>
             <a:r>
-              <a:rPr sz="3400" b="1" i="0">
+              <a:rPr sz="3400" b="0" i="0">
                 <a:solidFill>
                   <a:srgbClr val="974F16"/>
                 </a:solidFill>
-                <a:latin typeface="Libre Caslon Display"/>
+                <a:latin typeface="Georgia"/>
               </a:rPr>
               <a:t>Myth</a:t>
             </a:r>
@@ -7459,7 +7459,7 @@
                 <a:solidFill>
                   <a:srgbClr val="2E3436"/>
                 </a:solidFill>
-                <a:latin typeface="Karla"/>
+                <a:latin typeface="Calibri"/>
               </a:rPr>
               <a:t>Rereading feels productive because the page starts to look familiar, but it does little for your memory. Researchers rate it as one of the least useful methods.</a:t>
             </a:r>
@@ -7525,7 +7525,7 @@
                 <a:solidFill>
                   <a:srgbClr val="8B9179"/>
                 </a:solidFill>
-                <a:latin typeface="Karla"/>
+                <a:latin typeface="Calibri"/>
               </a:rPr>
               <a:t>The Pastoral Guide</a:t>
             </a:r>
@@ -7567,7 +7567,7 @@
                 <a:solidFill>
                   <a:srgbClr val="8B9179"/>
                 </a:solidFill>
-                <a:latin typeface="Karla"/>
+                <a:latin typeface="Calibri"/>
               </a:rPr>
               <a:t>15 / 27</a:t>
             </a:r>
@@ -7671,7 +7671,7 @@
                 <a:solidFill>
                   <a:srgbClr val="974F16"/>
                 </a:solidFill>
-                <a:latin typeface="Karla"/>
+                <a:latin typeface="Calibri"/>
               </a:rPr>
               <a:t>THE FORM TIME QUIZ  ·  ANSWERS  ·  QUESTION 2</a:t>
             </a:r>
@@ -7713,7 +7713,7 @@
                 <a:solidFill>
                   <a:srgbClr val="5C6552"/>
                 </a:solidFill>
-                <a:latin typeface="Karla"/>
+                <a:latin typeface="Calibri"/>
               </a:rPr>
               <a:t>Testing yourself helps you remember more than rereading does.</a:t>
             </a:r>
@@ -7751,11 +7751,11 @@
               </a:spcAft>
             </a:pPr>
             <a:r>
-              <a:rPr sz="3400" b="1" i="0">
+              <a:rPr sz="3400" b="0" i="0">
                 <a:solidFill>
                   <a:srgbClr val="974F16"/>
                 </a:solidFill>
-                <a:latin typeface="Libre Caslon Display"/>
+                <a:latin typeface="Georgia"/>
               </a:rPr>
               <a:t>Fact</a:t>
             </a:r>
@@ -7887,7 +7887,7 @@
                 <a:solidFill>
                   <a:srgbClr val="2E3436"/>
                 </a:solidFill>
-                <a:latin typeface="Karla"/>
+                <a:latin typeface="Calibri"/>
               </a:rPr>
               <a:t>Pulling an answer out of your memory makes it stronger. Flashcards, past questions and writing out what you remember on a blank page all work this way.</a:t>
             </a:r>
@@ -7953,7 +7953,7 @@
                 <a:solidFill>
                   <a:srgbClr val="8B9179"/>
                 </a:solidFill>
-                <a:latin typeface="Karla"/>
+                <a:latin typeface="Calibri"/>
               </a:rPr>
               <a:t>The Pastoral Guide</a:t>
             </a:r>
@@ -7995,7 +7995,7 @@
                 <a:solidFill>
                   <a:srgbClr val="8B9179"/>
                 </a:solidFill>
-                <a:latin typeface="Karla"/>
+                <a:latin typeface="Calibri"/>
               </a:rPr>
               <a:t>16 / 27</a:t>
             </a:r>
@@ -8099,7 +8099,7 @@
                 <a:solidFill>
                   <a:srgbClr val="974F16"/>
                 </a:solidFill>
-                <a:latin typeface="Karla"/>
+                <a:latin typeface="Calibri"/>
               </a:rPr>
               <a:t>THE FORM TIME QUIZ  ·  ANSWERS  ·  QUESTION 3</a:t>
             </a:r>
@@ -8141,7 +8141,7 @@
                 <a:solidFill>
                   <a:srgbClr val="5C6552"/>
                 </a:solidFill>
-                <a:latin typeface="Karla"/>
+                <a:latin typeface="Calibri"/>
               </a:rPr>
               <a:t>Spreading revision over several days works better than doing the same number of hours in one go.</a:t>
             </a:r>
@@ -8179,11 +8179,11 @@
               </a:spcAft>
             </a:pPr>
             <a:r>
-              <a:rPr sz="3400" b="1" i="0">
+              <a:rPr sz="3400" b="0" i="0">
                 <a:solidFill>
                   <a:srgbClr val="974F16"/>
                 </a:solidFill>
-                <a:latin typeface="Libre Caslon Display"/>
+                <a:latin typeface="Georgia"/>
               </a:rPr>
               <a:t>Fact</a:t>
             </a:r>
@@ -8315,7 +8315,7 @@
                 <a:solidFill>
                   <a:srgbClr val="2E3436"/>
                 </a:solidFill>
-                <a:latin typeface="Karla"/>
+                <a:latin typeface="Calibri"/>
               </a:rPr>
               <a:t>It is called spacing. Coming back to a topic after a gap, just as it starts to fade, makes it stick for much longer.</a:t>
             </a:r>
@@ -8381,7 +8381,7 @@
                 <a:solidFill>
                   <a:srgbClr val="8B9179"/>
                 </a:solidFill>
-                <a:latin typeface="Karla"/>
+                <a:latin typeface="Calibri"/>
               </a:rPr>
               <a:t>The Pastoral Guide</a:t>
             </a:r>
@@ -8423,7 +8423,7 @@
                 <a:solidFill>
                   <a:srgbClr val="8B9179"/>
                 </a:solidFill>
-                <a:latin typeface="Karla"/>
+                <a:latin typeface="Calibri"/>
               </a:rPr>
               <a:t>17 / 27</a:t>
             </a:r>
@@ -8527,7 +8527,7 @@
                 <a:solidFill>
                   <a:srgbClr val="974F16"/>
                 </a:solidFill>
-                <a:latin typeface="Karla"/>
+                <a:latin typeface="Calibri"/>
               </a:rPr>
               <a:t>THE FORM TIME QUIZ  ·  ANSWERS  ·  QUESTION 4</a:t>
             </a:r>
@@ -8569,7 +8569,7 @@
                 <a:solidFill>
                   <a:srgbClr val="5C6552"/>
                 </a:solidFill>
-                <a:latin typeface="Karla"/>
+                <a:latin typeface="Calibri"/>
               </a:rPr>
               <a:t>You learn best when your revision matches your learning style, such as visual or auditory.</a:t>
             </a:r>
@@ -8607,11 +8607,11 @@
               </a:spcAft>
             </a:pPr>
             <a:r>
-              <a:rPr sz="3400" b="1" i="0">
+              <a:rPr sz="3400" b="0" i="0">
                 <a:solidFill>
                   <a:srgbClr val="974F16"/>
                 </a:solidFill>
-                <a:latin typeface="Libre Caslon Display"/>
+                <a:latin typeface="Georgia"/>
               </a:rPr>
               <a:t>Myth</a:t>
             </a:r>
@@ -8743,7 +8743,7 @@
                 <a:solidFill>
                   <a:srgbClr val="2E3436"/>
                 </a:solidFill>
-                <a:latin typeface="Karla"/>
+                <a:latin typeface="Calibri"/>
               </a:rPr>
               <a:t>There is no good evidence for learning styles. Everybody learns better from a mix, and the method should suit the subject rather than the person.</a:t>
             </a:r>
@@ -8809,7 +8809,7 @@
                 <a:solidFill>
                   <a:srgbClr val="8B9179"/>
                 </a:solidFill>
-                <a:latin typeface="Karla"/>
+                <a:latin typeface="Calibri"/>
               </a:rPr>
               <a:t>The Pastoral Guide</a:t>
             </a:r>
@@ -8851,7 +8851,7 @@
                 <a:solidFill>
                   <a:srgbClr val="8B9179"/>
                 </a:solidFill>
-                <a:latin typeface="Karla"/>
+                <a:latin typeface="Calibri"/>
               </a:rPr>
               <a:t>18 / 27</a:t>
             </a:r>
@@ -8955,7 +8955,7 @@
                 <a:solidFill>
                   <a:srgbClr val="974F16"/>
                 </a:solidFill>
-                <a:latin typeface="Karla"/>
+                <a:latin typeface="Calibri"/>
               </a:rPr>
               <a:t>THE FORM TIME QUIZ  ·  ANSWERS  ·  QUESTION 5</a:t>
             </a:r>
@@ -8997,7 +8997,7 @@
                 <a:solidFill>
                   <a:srgbClr val="5C6552"/>
                 </a:solidFill>
-                <a:latin typeface="Karla"/>
+                <a:latin typeface="Calibri"/>
               </a:rPr>
               <a:t>Staying up all night before an exam helps you remember more.</a:t>
             </a:r>
@@ -9035,11 +9035,11 @@
               </a:spcAft>
             </a:pPr>
             <a:r>
-              <a:rPr sz="3400" b="1" i="0">
+              <a:rPr sz="3400" b="0" i="0">
                 <a:solidFill>
                   <a:srgbClr val="974F16"/>
                 </a:solidFill>
-                <a:latin typeface="Libre Caslon Display"/>
+                <a:latin typeface="Georgia"/>
               </a:rPr>
               <a:t>Myth</a:t>
             </a:r>
@@ -9171,7 +9171,7 @@
                 <a:solidFill>
                   <a:srgbClr val="2E3436"/>
                 </a:solidFill>
-                <a:latin typeface="Karla"/>
+                <a:latin typeface="Calibri"/>
               </a:rPr>
               <a:t>Losing a night’s sleep makes it harder to recall what you already know. Sleep is part of revising, not time taken away from it.</a:t>
             </a:r>
@@ -9237,7 +9237,7 @@
                 <a:solidFill>
                   <a:srgbClr val="8B9179"/>
                 </a:solidFill>
-                <a:latin typeface="Karla"/>
+                <a:latin typeface="Calibri"/>
               </a:rPr>
               <a:t>The Pastoral Guide</a:t>
             </a:r>
@@ -9279,7 +9279,7 @@
                 <a:solidFill>
                   <a:srgbClr val="8B9179"/>
                 </a:solidFill>
-                <a:latin typeface="Karla"/>
+                <a:latin typeface="Calibri"/>
               </a:rPr>
               <a:t>19 / 27</a:t>
             </a:r>
@@ -9396,7 +9396,7 @@
                 <a:solidFill>
                   <a:srgbClr val="974F16"/>
                 </a:solidFill>
-                <a:latin typeface="Karla"/>
+                <a:latin typeface="Calibri"/>
               </a:rPr>
               <a:t>ROUND ONE</a:t>
             </a:r>
@@ -9434,11 +9434,11 @@
               </a:spcAft>
             </a:pPr>
             <a:r>
-              <a:rPr sz="4000" b="1" i="0">
+              <a:rPr sz="4000" b="0" i="0">
                 <a:solidFill>
                   <a:srgbClr val="FFFDF7"/>
                 </a:solidFill>
-                <a:latin typeface="Libre Caslon Display"/>
+                <a:latin typeface="Georgia"/>
               </a:rPr>
               <a:t>How revision works</a:t>
             </a:r>
@@ -9524,7 +9524,7 @@
                 <a:solidFill>
                   <a:srgbClr val="EBCDAE"/>
                 </a:solidFill>
-                <a:latin typeface="Karla"/>
+                <a:latin typeface="Calibri"/>
               </a:rPr>
               <a:t>Six questions. Some are fact or myth, and some give you three options to choose from.</a:t>
             </a:r>
@@ -9590,7 +9590,7 @@
                 <a:solidFill>
                   <a:srgbClr val="EBCDAE"/>
                 </a:solidFill>
-                <a:latin typeface="Karla"/>
+                <a:latin typeface="Calibri"/>
               </a:rPr>
               <a:t>The Pastoral Guide</a:t>
             </a:r>
@@ -9632,7 +9632,7 @@
                 <a:solidFill>
                   <a:srgbClr val="EBCDAE"/>
                 </a:solidFill>
-                <a:latin typeface="Karla"/>
+                <a:latin typeface="Calibri"/>
               </a:rPr>
               <a:t>2 / 27</a:t>
             </a:r>
@@ -9736,7 +9736,7 @@
                 <a:solidFill>
                   <a:srgbClr val="974F16"/>
                 </a:solidFill>
-                <a:latin typeface="Karla"/>
+                <a:latin typeface="Calibri"/>
               </a:rPr>
               <a:t>THE FORM TIME QUIZ  ·  ANSWERS  ·  QUESTION 6</a:t>
             </a:r>
@@ -9778,7 +9778,7 @@
                 <a:solidFill>
                   <a:srgbClr val="5C6552"/>
                 </a:solidFill>
-                <a:latin typeface="Karla"/>
+                <a:latin typeface="Calibri"/>
               </a:rPr>
               <a:t>How much of your brain do you actually use?</a:t>
             </a:r>
@@ -9816,11 +9816,11 @@
               </a:spcAft>
             </a:pPr>
             <a:r>
-              <a:rPr sz="3400" b="1" i="0">
+              <a:rPr sz="3400" b="0" i="0">
                 <a:solidFill>
                   <a:srgbClr val="974F16"/>
                 </a:solidFill>
-                <a:latin typeface="Libre Caslon Display"/>
+                <a:latin typeface="Georgia"/>
               </a:rPr>
               <a:t>C.  All of it</a:t>
             </a:r>
@@ -9952,7 +9952,7 @@
                 <a:solidFill>
                   <a:srgbClr val="2E3436"/>
                 </a:solidFill>
-                <a:latin typeface="Karla"/>
+                <a:latin typeface="Calibri"/>
               </a:rPr>
               <a:t>Brain scans show activity right across the brain, even during sleep. The ten per cent figure is one of the most repeated myths about the brain, and it has never been true.</a:t>
             </a:r>
@@ -10018,7 +10018,7 @@
                 <a:solidFill>
                   <a:srgbClr val="8B9179"/>
                 </a:solidFill>
-                <a:latin typeface="Karla"/>
+                <a:latin typeface="Calibri"/>
               </a:rPr>
               <a:t>The Pastoral Guide</a:t>
             </a:r>
@@ -10060,7 +10060,7 @@
                 <a:solidFill>
                   <a:srgbClr val="8B9179"/>
                 </a:solidFill>
-                <a:latin typeface="Karla"/>
+                <a:latin typeface="Calibri"/>
               </a:rPr>
               <a:t>20 / 27</a:t>
             </a:r>
@@ -10164,7 +10164,7 @@
                 <a:solidFill>
                   <a:srgbClr val="974F16"/>
                 </a:solidFill>
-                <a:latin typeface="Karla"/>
+                <a:latin typeface="Calibri"/>
               </a:rPr>
               <a:t>THE FORM TIME QUIZ  ·  ANSWERS  ·  QUESTION 7</a:t>
             </a:r>
@@ -10206,7 +10206,7 @@
                 <a:solidFill>
                   <a:srgbClr val="5C6552"/>
                 </a:solidFill>
-                <a:latin typeface="Karla"/>
+                <a:latin typeface="Calibri"/>
               </a:rPr>
               <a:t>What is the chemical symbol for gold?</a:t>
             </a:r>
@@ -10244,11 +10244,11 @@
               </a:spcAft>
             </a:pPr>
             <a:r>
-              <a:rPr sz="3400" b="1" i="0">
+              <a:rPr sz="3400" b="0" i="0">
                 <a:solidFill>
                   <a:srgbClr val="974F16"/>
                 </a:solidFill>
-                <a:latin typeface="Libre Caslon Display"/>
+                <a:latin typeface="Georgia"/>
               </a:rPr>
               <a:t>Au</a:t>
             </a:r>
@@ -10380,7 +10380,7 @@
                 <a:solidFill>
                   <a:srgbClr val="2E3436"/>
                 </a:solidFill>
-                <a:latin typeface="Karla"/>
+                <a:latin typeface="Calibri"/>
               </a:rPr>
               <a:t>It comes from aurum, the Latin word for gold.</a:t>
             </a:r>
@@ -10446,7 +10446,7 @@
                 <a:solidFill>
                   <a:srgbClr val="8B9179"/>
                 </a:solidFill>
-                <a:latin typeface="Karla"/>
+                <a:latin typeface="Calibri"/>
               </a:rPr>
               <a:t>The Pastoral Guide</a:t>
             </a:r>
@@ -10488,7 +10488,7 @@
                 <a:solidFill>
                   <a:srgbClr val="8B9179"/>
                 </a:solidFill>
-                <a:latin typeface="Karla"/>
+                <a:latin typeface="Calibri"/>
               </a:rPr>
               <a:t>21 / 27</a:t>
             </a:r>
@@ -10592,7 +10592,7 @@
                 <a:solidFill>
                   <a:srgbClr val="974F16"/>
                 </a:solidFill>
-                <a:latin typeface="Karla"/>
+                <a:latin typeface="Calibri"/>
               </a:rPr>
               <a:t>THE FORM TIME QUIZ  ·  ANSWERS  ·  QUESTION 8</a:t>
             </a:r>
@@ -10634,7 +10634,7 @@
                 <a:solidFill>
                   <a:srgbClr val="5C6552"/>
                 </a:solidFill>
-                <a:latin typeface="Karla"/>
+                <a:latin typeface="Calibri"/>
               </a:rPr>
               <a:t>Which is the longest river in Africa?</a:t>
             </a:r>
@@ -10672,11 +10672,11 @@
               </a:spcAft>
             </a:pPr>
             <a:r>
-              <a:rPr sz="3400" b="1" i="0">
+              <a:rPr sz="3400" b="0" i="0">
                 <a:solidFill>
                   <a:srgbClr val="974F16"/>
                 </a:solidFill>
-                <a:latin typeface="Libre Caslon Display"/>
+                <a:latin typeface="Georgia"/>
               </a:rPr>
               <a:t>The Nile</a:t>
             </a:r>
@@ -10808,7 +10808,7 @@
                 <a:solidFill>
                   <a:srgbClr val="2E3436"/>
                 </a:solidFill>
-                <a:latin typeface="Karla"/>
+                <a:latin typeface="Calibri"/>
               </a:rPr>
               <a:t>It runs for about 6,650 kilometres and flows through eleven countries.</a:t>
             </a:r>
@@ -10874,7 +10874,7 @@
                 <a:solidFill>
                   <a:srgbClr val="8B9179"/>
                 </a:solidFill>
-                <a:latin typeface="Karla"/>
+                <a:latin typeface="Calibri"/>
               </a:rPr>
               <a:t>The Pastoral Guide</a:t>
             </a:r>
@@ -10916,7 +10916,7 @@
                 <a:solidFill>
                   <a:srgbClr val="8B9179"/>
                 </a:solidFill>
-                <a:latin typeface="Karla"/>
+                <a:latin typeface="Calibri"/>
               </a:rPr>
               <a:t>22 / 27</a:t>
             </a:r>
@@ -11020,7 +11020,7 @@
                 <a:solidFill>
                   <a:srgbClr val="974F16"/>
                 </a:solidFill>
-                <a:latin typeface="Karla"/>
+                <a:latin typeface="Calibri"/>
               </a:rPr>
               <a:t>THE FORM TIME QUIZ  ·  ANSWERS  ·  QUESTION 9</a:t>
             </a:r>
@@ -11062,7 +11062,7 @@
                 <a:solidFill>
                   <a:srgbClr val="5C6552"/>
                 </a:solidFill>
-                <a:latin typeface="Karla"/>
+                <a:latin typeface="Calibri"/>
               </a:rPr>
               <a:t>How many bones are there in an adult human body?</a:t>
             </a:r>
@@ -11100,11 +11100,11 @@
               </a:spcAft>
             </a:pPr>
             <a:r>
-              <a:rPr sz="3400" b="1" i="0">
+              <a:rPr sz="3400" b="0" i="0">
                 <a:solidFill>
                   <a:srgbClr val="974F16"/>
                 </a:solidFill>
-                <a:latin typeface="Libre Caslon Display"/>
+                <a:latin typeface="Georgia"/>
               </a:rPr>
               <a:t>B.  206</a:t>
             </a:r>
@@ -11236,7 +11236,7 @@
                 <a:solidFill>
                   <a:srgbClr val="2E3436"/>
                 </a:solidFill>
-                <a:latin typeface="Karla"/>
+                <a:latin typeface="Calibri"/>
               </a:rPr>
               <a:t>Babies are born with around 300. Some of them fuse together as they grow.</a:t>
             </a:r>
@@ -11302,7 +11302,7 @@
                 <a:solidFill>
                   <a:srgbClr val="8B9179"/>
                 </a:solidFill>
-                <a:latin typeface="Karla"/>
+                <a:latin typeface="Calibri"/>
               </a:rPr>
               <a:t>The Pastoral Guide</a:t>
             </a:r>
@@ -11344,7 +11344,7 @@
                 <a:solidFill>
                   <a:srgbClr val="8B9179"/>
                 </a:solidFill>
-                <a:latin typeface="Karla"/>
+                <a:latin typeface="Calibri"/>
               </a:rPr>
               <a:t>23 / 27</a:t>
             </a:r>
@@ -11448,7 +11448,7 @@
                 <a:solidFill>
                   <a:srgbClr val="974F16"/>
                 </a:solidFill>
-                <a:latin typeface="Karla"/>
+                <a:latin typeface="Calibri"/>
               </a:rPr>
               <a:t>THE FORM TIME QUIZ  ·  ANSWERS  ·  QUESTION 10</a:t>
             </a:r>
@@ -11490,7 +11490,7 @@
                 <a:solidFill>
                   <a:srgbClr val="5C6552"/>
                 </a:solidFill>
-                <a:latin typeface="Karla"/>
+                <a:latin typeface="Calibri"/>
               </a:rPr>
               <a:t>Which country’s flag has a red maple leaf on it?</a:t>
             </a:r>
@@ -11528,11 +11528,11 @@
               </a:spcAft>
             </a:pPr>
             <a:r>
-              <a:rPr sz="3400" b="1" i="0">
+              <a:rPr sz="3400" b="0" i="0">
                 <a:solidFill>
                   <a:srgbClr val="974F16"/>
                 </a:solidFill>
-                <a:latin typeface="Libre Caslon Display"/>
+                <a:latin typeface="Georgia"/>
               </a:rPr>
               <a:t>Canada</a:t>
             </a:r>
@@ -11664,7 +11664,7 @@
                 <a:solidFill>
                   <a:srgbClr val="2E3436"/>
                 </a:solidFill>
-                <a:latin typeface="Karla"/>
+                <a:latin typeface="Calibri"/>
               </a:rPr>
               <a:t>The maple leaf has been a symbol of Canada since the 1700s, long before it went on the flag.</a:t>
             </a:r>
@@ -11730,7 +11730,7 @@
                 <a:solidFill>
                   <a:srgbClr val="8B9179"/>
                 </a:solidFill>
-                <a:latin typeface="Karla"/>
+                <a:latin typeface="Calibri"/>
               </a:rPr>
               <a:t>The Pastoral Guide</a:t>
             </a:r>
@@ -11772,7 +11772,7 @@
                 <a:solidFill>
                   <a:srgbClr val="8B9179"/>
                 </a:solidFill>
-                <a:latin typeface="Karla"/>
+                <a:latin typeface="Calibri"/>
               </a:rPr>
               <a:t>24 / 27</a:t>
             </a:r>
@@ -11876,7 +11876,7 @@
                 <a:solidFill>
                   <a:srgbClr val="974F16"/>
                 </a:solidFill>
-                <a:latin typeface="Karla"/>
+                <a:latin typeface="Calibri"/>
               </a:rPr>
               <a:t>THE FORM TIME QUIZ  ·  VOLUME ONE</a:t>
             </a:r>
@@ -11938,11 +11938,11 @@
               </a:spcAft>
             </a:pPr>
             <a:r>
-              <a:rPr sz="3200" b="1" i="0">
+              <a:rPr sz="3200" b="0" i="0">
                 <a:solidFill>
                   <a:srgbClr val="974F16"/>
                 </a:solidFill>
-                <a:latin typeface="Libre Caslon Display"/>
+                <a:latin typeface="Georgia"/>
               </a:rPr>
               <a:t>Scores back to their owners</a:t>
             </a:r>
@@ -11984,7 +11984,7 @@
                 <a:solidFill>
                   <a:srgbClr val="5C6552"/>
                 </a:solidFill>
-                <a:latin typeface="Karla"/>
+                <a:latin typeface="Calibri"/>
               </a:rPr>
               <a:t>Hands up if you got ten. Then hands up if one of the answers surprised you, and tell us which.</a:t>
             </a:r>
@@ -12026,7 +12026,7 @@
                 <a:solidFill>
                   <a:srgbClr val="8B9179"/>
                 </a:solidFill>
-                <a:latin typeface="Karla"/>
+                <a:latin typeface="Calibri"/>
               </a:rPr>
               <a:t>Volume Two is available now at thepastoralguide.com.</a:t>
             </a:r>
@@ -12092,7 +12092,7 @@
                 <a:solidFill>
                   <a:srgbClr val="8B9179"/>
                 </a:solidFill>
-                <a:latin typeface="Karla"/>
+                <a:latin typeface="Calibri"/>
               </a:rPr>
               <a:t>The Pastoral Guide</a:t>
             </a:r>
@@ -12134,7 +12134,7 @@
                 <a:solidFill>
                   <a:srgbClr val="8B9179"/>
                 </a:solidFill>
-                <a:latin typeface="Karla"/>
+                <a:latin typeface="Calibri"/>
               </a:rPr>
               <a:t>25 / 27</a:t>
             </a:r>
@@ -12251,7 +12251,7 @@
                 <a:solidFill>
                   <a:srgbClr val="974F16"/>
                 </a:solidFill>
-                <a:latin typeface="Karla"/>
+                <a:latin typeface="Calibri"/>
               </a:rPr>
               <a:t>FOR THE TEACHER  ·  ADD YOUR OWN</a:t>
             </a:r>
@@ -12427,7 +12427,7 @@
                 <a:solidFill>
                   <a:srgbClr val="FFFDF7"/>
                 </a:solidFill>
-                <a:latin typeface="Karla"/>
+                <a:latin typeface="Calibri"/>
               </a:rPr>
               <a:t>?</a:t>
             </a:r>
@@ -12465,11 +12465,11 @@
               </a:spcAft>
             </a:pPr>
             <a:r>
-              <a:rPr sz="2400" b="1" i="0">
+              <a:rPr sz="2400" b="0" i="0">
                 <a:solidFill>
                   <a:srgbClr val="974F16"/>
                 </a:solidFill>
-                <a:latin typeface="Libre Caslon Display"/>
+                <a:latin typeface="Georgia"/>
               </a:rPr>
               <a:t>[ Type your own question here ]</a:t>
             </a:r>
@@ -12511,7 +12511,7 @@
                 <a:solidFill>
                   <a:srgbClr val="5C6552"/>
                 </a:solidFill>
-                <a:latin typeface="Karla"/>
+                <a:latin typeface="Calibri"/>
               </a:rPr>
               <a:t>Add your own questions here: something from assembly, a date coming up, or a question about your own school.</a:t>
             </a:r>
@@ -12533,7 +12533,7 @@
                 <a:solidFill>
                   <a:srgbClr val="5C6552"/>
                 </a:solidFill>
-                <a:latin typeface="Karla"/>
+                <a:latin typeface="Calibri"/>
               </a:rPr>
               <a:t>Duplicate this slide for each one and drag it in after question 10. There are two spare rows on the answer sheet for them.</a:t>
             </a:r>
@@ -12599,7 +12599,7 @@
                 <a:solidFill>
                   <a:srgbClr val="8B9179"/>
                 </a:solidFill>
-                <a:latin typeface="Karla"/>
+                <a:latin typeface="Calibri"/>
               </a:rPr>
               <a:t>The Pastoral Guide</a:t>
             </a:r>
@@ -12641,7 +12641,7 @@
                 <a:solidFill>
                   <a:srgbClr val="8B9179"/>
                 </a:solidFill>
-                <a:latin typeface="Karla"/>
+                <a:latin typeface="Calibri"/>
               </a:rPr>
               <a:t>26 / 27</a:t>
             </a:r>
@@ -12758,7 +12758,7 @@
                 <a:solidFill>
                   <a:srgbClr val="974F16"/>
                 </a:solidFill>
-                <a:latin typeface="Karla"/>
+                <a:latin typeface="Calibri"/>
               </a:rPr>
               <a:t>FOR THE TEACHER  ·  ADD YOUR OWN</a:t>
             </a:r>
@@ -12800,7 +12800,7 @@
                 <a:solidFill>
                   <a:srgbClr val="5C6552"/>
                 </a:solidFill>
-                <a:latin typeface="Karla"/>
+                <a:latin typeface="Calibri"/>
               </a:rPr>
               <a:t>[ Your question again, so the room remembers it ]</a:t>
             </a:r>
@@ -12838,11 +12838,11 @@
               </a:spcAft>
             </a:pPr>
             <a:r>
-              <a:rPr sz="3400" b="1" i="0">
+              <a:rPr sz="3400" b="0" i="0">
                 <a:solidFill>
                   <a:srgbClr val="974F16"/>
                 </a:solidFill>
-                <a:latin typeface="Libre Caslon Display"/>
+                <a:latin typeface="Georgia"/>
               </a:rPr>
               <a:t>[ The answer ]</a:t>
             </a:r>
@@ -12974,7 +12974,7 @@
                 <a:solidFill>
                   <a:srgbClr val="2E3436"/>
                 </a:solidFill>
-                <a:latin typeface="Karla"/>
+                <a:latin typeface="Calibri"/>
               </a:rPr>
               <a:t>[ One line on why, if there is something worth knowing ]</a:t>
             </a:r>
@@ -13016,7 +13016,7 @@
                 <a:solidFill>
                   <a:srgbClr val="5C6552"/>
                 </a:solidFill>
-                <a:latin typeface="Karla"/>
+                <a:latin typeface="Calibri"/>
               </a:rPr>
               <a:t>Duplicate this slide for each of your own questions and drag it in after the answer to question 10.</a:t>
             </a:r>
@@ -13082,7 +13082,7 @@
                 <a:solidFill>
                   <a:srgbClr val="8B9179"/>
                 </a:solidFill>
-                <a:latin typeface="Karla"/>
+                <a:latin typeface="Calibri"/>
               </a:rPr>
               <a:t>The Pastoral Guide</a:t>
             </a:r>
@@ -13124,7 +13124,7 @@
                 <a:solidFill>
                   <a:srgbClr val="8B9179"/>
                 </a:solidFill>
-                <a:latin typeface="Karla"/>
+                <a:latin typeface="Calibri"/>
               </a:rPr>
               <a:t>27 / 27</a:t>
             </a:r>
@@ -13228,7 +13228,7 @@
                 <a:solidFill>
                   <a:srgbClr val="974F16"/>
                 </a:solidFill>
-                <a:latin typeface="Karla"/>
+                <a:latin typeface="Calibri"/>
               </a:rPr>
               <a:t>THE FORM TIME QUIZ  ·  ROUND ONE  ·  QUESTION 1 OF 10</a:t>
             </a:r>
@@ -13404,7 +13404,7 @@
                 <a:solidFill>
                   <a:srgbClr val="FFFDF7"/>
                 </a:solidFill>
-                <a:latin typeface="Karla"/>
+                <a:latin typeface="Calibri"/>
               </a:rPr>
               <a:t>1</a:t>
             </a:r>
@@ -13442,11 +13442,11 @@
               </a:spcAft>
             </a:pPr>
             <a:r>
-              <a:rPr sz="2400" b="1" i="0">
+              <a:rPr sz="2400" b="0" i="0">
                 <a:solidFill>
                   <a:srgbClr val="974F16"/>
                 </a:solidFill>
-                <a:latin typeface="Libre Caslon Display"/>
+                <a:latin typeface="Georgia"/>
               </a:rPr>
               <a:t>Reading your notes again and again is one of the best ways to revise.</a:t>
             </a:r>
@@ -13488,7 +13488,7 @@
                 <a:solidFill>
                   <a:srgbClr val="8B9179"/>
                 </a:solidFill>
-                <a:latin typeface="Karla"/>
+                <a:latin typeface="Calibri"/>
               </a:rPr>
               <a:t>FACT OR MYTH?</a:t>
             </a:r>
@@ -13616,11 +13616,11 @@
               </a:spcAft>
             </a:pPr>
             <a:r>
-              <a:rPr sz="2000" b="1" i="0">
+              <a:rPr sz="2000" b="0" i="0">
                 <a:solidFill>
                   <a:srgbClr val="974F16"/>
                 </a:solidFill>
-                <a:latin typeface="Libre Caslon Display"/>
+                <a:latin typeface="Georgia"/>
               </a:rPr>
               <a:t>Fact</a:t>
             </a:r>
@@ -13748,11 +13748,11 @@
               </a:spcAft>
             </a:pPr>
             <a:r>
-              <a:rPr sz="2000" b="1" i="0">
+              <a:rPr sz="2000" b="0" i="0">
                 <a:solidFill>
                   <a:srgbClr val="974F16"/>
                 </a:solidFill>
-                <a:latin typeface="Libre Caslon Display"/>
+                <a:latin typeface="Georgia"/>
               </a:rPr>
               <a:t>Myth</a:t>
             </a:r>
@@ -13794,7 +13794,7 @@
                 <a:solidFill>
                   <a:srgbClr val="5C6552"/>
                 </a:solidFill>
-                <a:latin typeface="Karla"/>
+                <a:latin typeface="Calibri"/>
               </a:rPr>
               <a:t>Agree it as a team, then tick it on the sheet.</a:t>
             </a:r>
@@ -13860,7 +13860,7 @@
                 <a:solidFill>
                   <a:srgbClr val="8B9179"/>
                 </a:solidFill>
-                <a:latin typeface="Karla"/>
+                <a:latin typeface="Calibri"/>
               </a:rPr>
               <a:t>The Pastoral Guide</a:t>
             </a:r>
@@ -13902,7 +13902,7 @@
                 <a:solidFill>
                   <a:srgbClr val="8B9179"/>
                 </a:solidFill>
-                <a:latin typeface="Karla"/>
+                <a:latin typeface="Calibri"/>
               </a:rPr>
               <a:t>3 / 27</a:t>
             </a:r>
@@ -14006,7 +14006,7 @@
                 <a:solidFill>
                   <a:srgbClr val="974F16"/>
                 </a:solidFill>
-                <a:latin typeface="Karla"/>
+                <a:latin typeface="Calibri"/>
               </a:rPr>
               <a:t>THE FORM TIME QUIZ  ·  ROUND ONE  ·  QUESTION 2 OF 10</a:t>
             </a:r>
@@ -14182,7 +14182,7 @@
                 <a:solidFill>
                   <a:srgbClr val="FFFDF7"/>
                 </a:solidFill>
-                <a:latin typeface="Karla"/>
+                <a:latin typeface="Calibri"/>
               </a:rPr>
               <a:t>2</a:t>
             </a:r>
@@ -14220,11 +14220,11 @@
               </a:spcAft>
             </a:pPr>
             <a:r>
-              <a:rPr sz="2400" b="1" i="0">
+              <a:rPr sz="2400" b="0" i="0">
                 <a:solidFill>
                   <a:srgbClr val="974F16"/>
                 </a:solidFill>
-                <a:latin typeface="Libre Caslon Display"/>
+                <a:latin typeface="Georgia"/>
               </a:rPr>
               <a:t>Testing yourself helps you remember more than rereading does.</a:t>
             </a:r>
@@ -14266,7 +14266,7 @@
                 <a:solidFill>
                   <a:srgbClr val="8B9179"/>
                 </a:solidFill>
-                <a:latin typeface="Karla"/>
+                <a:latin typeface="Calibri"/>
               </a:rPr>
               <a:t>FACT OR MYTH?</a:t>
             </a:r>
@@ -14394,11 +14394,11 @@
               </a:spcAft>
             </a:pPr>
             <a:r>
-              <a:rPr sz="2000" b="1" i="0">
+              <a:rPr sz="2000" b="0" i="0">
                 <a:solidFill>
                   <a:srgbClr val="974F16"/>
                 </a:solidFill>
-                <a:latin typeface="Libre Caslon Display"/>
+                <a:latin typeface="Georgia"/>
               </a:rPr>
               <a:t>Fact</a:t>
             </a:r>
@@ -14526,11 +14526,11 @@
               </a:spcAft>
             </a:pPr>
             <a:r>
-              <a:rPr sz="2000" b="1" i="0">
+              <a:rPr sz="2000" b="0" i="0">
                 <a:solidFill>
                   <a:srgbClr val="974F16"/>
                 </a:solidFill>
-                <a:latin typeface="Libre Caslon Display"/>
+                <a:latin typeface="Georgia"/>
               </a:rPr>
               <a:t>Myth</a:t>
             </a:r>
@@ -14572,7 +14572,7 @@
                 <a:solidFill>
                   <a:srgbClr val="5C6552"/>
                 </a:solidFill>
-                <a:latin typeface="Karla"/>
+                <a:latin typeface="Calibri"/>
               </a:rPr>
               <a:t>Agree it as a team, then tick it on the sheet.</a:t>
             </a:r>
@@ -14638,7 +14638,7 @@
                 <a:solidFill>
                   <a:srgbClr val="8B9179"/>
                 </a:solidFill>
-                <a:latin typeface="Karla"/>
+                <a:latin typeface="Calibri"/>
               </a:rPr>
               <a:t>The Pastoral Guide</a:t>
             </a:r>
@@ -14680,7 +14680,7 @@
                 <a:solidFill>
                   <a:srgbClr val="8B9179"/>
                 </a:solidFill>
-                <a:latin typeface="Karla"/>
+                <a:latin typeface="Calibri"/>
               </a:rPr>
               <a:t>4 / 27</a:t>
             </a:r>
@@ -14784,7 +14784,7 @@
                 <a:solidFill>
                   <a:srgbClr val="974F16"/>
                 </a:solidFill>
-                <a:latin typeface="Karla"/>
+                <a:latin typeface="Calibri"/>
               </a:rPr>
               <a:t>THE FORM TIME QUIZ  ·  ROUND ONE  ·  QUESTION 3 OF 10</a:t>
             </a:r>
@@ -14960,7 +14960,7 @@
                 <a:solidFill>
                   <a:srgbClr val="FFFDF7"/>
                 </a:solidFill>
-                <a:latin typeface="Karla"/>
+                <a:latin typeface="Calibri"/>
               </a:rPr>
               <a:t>3</a:t>
             </a:r>
@@ -14998,11 +14998,11 @@
               </a:spcAft>
             </a:pPr>
             <a:r>
-              <a:rPr sz="2400" b="1" i="0">
+              <a:rPr sz="2400" b="0" i="0">
                 <a:solidFill>
                   <a:srgbClr val="974F16"/>
                 </a:solidFill>
-                <a:latin typeface="Libre Caslon Display"/>
+                <a:latin typeface="Georgia"/>
               </a:rPr>
               <a:t>Spreading revision over several days works better than doing the same number of hours in one go.</a:t>
             </a:r>
@@ -15044,7 +15044,7 @@
                 <a:solidFill>
                   <a:srgbClr val="8B9179"/>
                 </a:solidFill>
-                <a:latin typeface="Karla"/>
+                <a:latin typeface="Calibri"/>
               </a:rPr>
               <a:t>FACT OR MYTH?</a:t>
             </a:r>
@@ -15172,11 +15172,11 @@
               </a:spcAft>
             </a:pPr>
             <a:r>
-              <a:rPr sz="2000" b="1" i="0">
+              <a:rPr sz="2000" b="0" i="0">
                 <a:solidFill>
                   <a:srgbClr val="974F16"/>
                 </a:solidFill>
-                <a:latin typeface="Libre Caslon Display"/>
+                <a:latin typeface="Georgia"/>
               </a:rPr>
               <a:t>Fact</a:t>
             </a:r>
@@ -15304,11 +15304,11 @@
               </a:spcAft>
             </a:pPr>
             <a:r>
-              <a:rPr sz="2000" b="1" i="0">
+              <a:rPr sz="2000" b="0" i="0">
                 <a:solidFill>
                   <a:srgbClr val="974F16"/>
                 </a:solidFill>
-                <a:latin typeface="Libre Caslon Display"/>
+                <a:latin typeface="Georgia"/>
               </a:rPr>
               <a:t>Myth</a:t>
             </a:r>
@@ -15350,7 +15350,7 @@
                 <a:solidFill>
                   <a:srgbClr val="5C6552"/>
                 </a:solidFill>
-                <a:latin typeface="Karla"/>
+                <a:latin typeface="Calibri"/>
               </a:rPr>
               <a:t>Agree it as a team, then tick it on the sheet.</a:t>
             </a:r>
@@ -15416,7 +15416,7 @@
                 <a:solidFill>
                   <a:srgbClr val="8B9179"/>
                 </a:solidFill>
-                <a:latin typeface="Karla"/>
+                <a:latin typeface="Calibri"/>
               </a:rPr>
               <a:t>The Pastoral Guide</a:t>
             </a:r>
@@ -15458,7 +15458,7 @@
                 <a:solidFill>
                   <a:srgbClr val="8B9179"/>
                 </a:solidFill>
-                <a:latin typeface="Karla"/>
+                <a:latin typeface="Calibri"/>
               </a:rPr>
               <a:t>5 / 27</a:t>
             </a:r>
@@ -15562,7 +15562,7 @@
                 <a:solidFill>
                   <a:srgbClr val="974F16"/>
                 </a:solidFill>
-                <a:latin typeface="Karla"/>
+                <a:latin typeface="Calibri"/>
               </a:rPr>
               <a:t>THE FORM TIME QUIZ  ·  ROUND ONE  ·  QUESTION 4 OF 10</a:t>
             </a:r>
@@ -15738,7 +15738,7 @@
                 <a:solidFill>
                   <a:srgbClr val="FFFDF7"/>
                 </a:solidFill>
-                <a:latin typeface="Karla"/>
+                <a:latin typeface="Calibri"/>
               </a:rPr>
               <a:t>4</a:t>
             </a:r>
@@ -15776,11 +15776,11 @@
               </a:spcAft>
             </a:pPr>
             <a:r>
-              <a:rPr sz="2400" b="1" i="0">
+              <a:rPr sz="2400" b="0" i="0">
                 <a:solidFill>
                   <a:srgbClr val="974F16"/>
                 </a:solidFill>
-                <a:latin typeface="Libre Caslon Display"/>
+                <a:latin typeface="Georgia"/>
               </a:rPr>
               <a:t>You learn best when your revision matches your learning style, such as visual or auditory.</a:t>
             </a:r>
@@ -15822,7 +15822,7 @@
                 <a:solidFill>
                   <a:srgbClr val="8B9179"/>
                 </a:solidFill>
-                <a:latin typeface="Karla"/>
+                <a:latin typeface="Calibri"/>
               </a:rPr>
               <a:t>FACT OR MYTH?</a:t>
             </a:r>
@@ -15950,11 +15950,11 @@
               </a:spcAft>
             </a:pPr>
             <a:r>
-              <a:rPr sz="2000" b="1" i="0">
+              <a:rPr sz="2000" b="0" i="0">
                 <a:solidFill>
                   <a:srgbClr val="974F16"/>
                 </a:solidFill>
-                <a:latin typeface="Libre Caslon Display"/>
+                <a:latin typeface="Georgia"/>
               </a:rPr>
               <a:t>Fact</a:t>
             </a:r>
@@ -16082,11 +16082,11 @@
               </a:spcAft>
             </a:pPr>
             <a:r>
-              <a:rPr sz="2000" b="1" i="0">
+              <a:rPr sz="2000" b="0" i="0">
                 <a:solidFill>
                   <a:srgbClr val="974F16"/>
                 </a:solidFill>
-                <a:latin typeface="Libre Caslon Display"/>
+                <a:latin typeface="Georgia"/>
               </a:rPr>
               <a:t>Myth</a:t>
             </a:r>
@@ -16128,7 +16128,7 @@
                 <a:solidFill>
                   <a:srgbClr val="5C6552"/>
                 </a:solidFill>
-                <a:latin typeface="Karla"/>
+                <a:latin typeface="Calibri"/>
               </a:rPr>
               <a:t>Agree it as a team, then tick it on the sheet.</a:t>
             </a:r>
@@ -16194,7 +16194,7 @@
                 <a:solidFill>
                   <a:srgbClr val="8B9179"/>
                 </a:solidFill>
-                <a:latin typeface="Karla"/>
+                <a:latin typeface="Calibri"/>
               </a:rPr>
               <a:t>The Pastoral Guide</a:t>
             </a:r>
@@ -16236,7 +16236,7 @@
                 <a:solidFill>
                   <a:srgbClr val="8B9179"/>
                 </a:solidFill>
-                <a:latin typeface="Karla"/>
+                <a:latin typeface="Calibri"/>
               </a:rPr>
               <a:t>6 / 27</a:t>
             </a:r>
@@ -16340,7 +16340,7 @@
                 <a:solidFill>
                   <a:srgbClr val="974F16"/>
                 </a:solidFill>
-                <a:latin typeface="Karla"/>
+                <a:latin typeface="Calibri"/>
               </a:rPr>
               <a:t>THE FORM TIME QUIZ  ·  ROUND ONE  ·  QUESTION 5 OF 10</a:t>
             </a:r>
@@ -16516,7 +16516,7 @@
                 <a:solidFill>
                   <a:srgbClr val="FFFDF7"/>
                 </a:solidFill>
-                <a:latin typeface="Karla"/>
+                <a:latin typeface="Calibri"/>
               </a:rPr>
               <a:t>5</a:t>
             </a:r>
@@ -16554,11 +16554,11 @@
               </a:spcAft>
             </a:pPr>
             <a:r>
-              <a:rPr sz="2400" b="1" i="0">
+              <a:rPr sz="2400" b="0" i="0">
                 <a:solidFill>
                   <a:srgbClr val="974F16"/>
                 </a:solidFill>
-                <a:latin typeface="Libre Caslon Display"/>
+                <a:latin typeface="Georgia"/>
               </a:rPr>
               <a:t>Staying up all night before an exam helps you remember more.</a:t>
             </a:r>
@@ -16600,7 +16600,7 @@
                 <a:solidFill>
                   <a:srgbClr val="8B9179"/>
                 </a:solidFill>
-                <a:latin typeface="Karla"/>
+                <a:latin typeface="Calibri"/>
               </a:rPr>
               <a:t>FACT OR MYTH?</a:t>
             </a:r>
@@ -16728,11 +16728,11 @@
               </a:spcAft>
             </a:pPr>
             <a:r>
-              <a:rPr sz="2000" b="1" i="0">
+              <a:rPr sz="2000" b="0" i="0">
                 <a:solidFill>
                   <a:srgbClr val="974F16"/>
                 </a:solidFill>
-                <a:latin typeface="Libre Caslon Display"/>
+                <a:latin typeface="Georgia"/>
               </a:rPr>
               <a:t>Fact</a:t>
             </a:r>
@@ -16860,11 +16860,11 @@
               </a:spcAft>
             </a:pPr>
             <a:r>
-              <a:rPr sz="2000" b="1" i="0">
+              <a:rPr sz="2000" b="0" i="0">
                 <a:solidFill>
                   <a:srgbClr val="974F16"/>
                 </a:solidFill>
-                <a:latin typeface="Libre Caslon Display"/>
+                <a:latin typeface="Georgia"/>
               </a:rPr>
               <a:t>Myth</a:t>
             </a:r>
@@ -16906,7 +16906,7 @@
                 <a:solidFill>
                   <a:srgbClr val="5C6552"/>
                 </a:solidFill>
-                <a:latin typeface="Karla"/>
+                <a:latin typeface="Calibri"/>
               </a:rPr>
               <a:t>Agree it as a team, then tick it on the sheet.</a:t>
             </a:r>
@@ -16972,7 +16972,7 @@
                 <a:solidFill>
                   <a:srgbClr val="8B9179"/>
                 </a:solidFill>
-                <a:latin typeface="Karla"/>
+                <a:latin typeface="Calibri"/>
               </a:rPr>
               <a:t>The Pastoral Guide</a:t>
             </a:r>
@@ -17014,7 +17014,7 @@
                 <a:solidFill>
                   <a:srgbClr val="8B9179"/>
                 </a:solidFill>
-                <a:latin typeface="Karla"/>
+                <a:latin typeface="Calibri"/>
               </a:rPr>
               <a:t>7 / 27</a:t>
             </a:r>
@@ -17118,7 +17118,7 @@
                 <a:solidFill>
                   <a:srgbClr val="974F16"/>
                 </a:solidFill>
-                <a:latin typeface="Karla"/>
+                <a:latin typeface="Calibri"/>
               </a:rPr>
               <a:t>THE FORM TIME QUIZ  ·  ROUND ONE  ·  QUESTION 6 OF 10</a:t>
             </a:r>
@@ -17294,7 +17294,7 @@
                 <a:solidFill>
                   <a:srgbClr val="FFFDF7"/>
                 </a:solidFill>
-                <a:latin typeface="Karla"/>
+                <a:latin typeface="Calibri"/>
               </a:rPr>
               <a:t>6</a:t>
             </a:r>
@@ -17332,11 +17332,11 @@
               </a:spcAft>
             </a:pPr>
             <a:r>
-              <a:rPr sz="2400" b="1" i="0">
+              <a:rPr sz="2400" b="0" i="0">
                 <a:solidFill>
                   <a:srgbClr val="974F16"/>
                 </a:solidFill>
-                <a:latin typeface="Libre Caslon Display"/>
+                <a:latin typeface="Georgia"/>
               </a:rPr>
               <a:t>How much of your brain do you actually use?</a:t>
             </a:r>
@@ -17378,7 +17378,7 @@
                 <a:solidFill>
                   <a:srgbClr val="8B9179"/>
                 </a:solidFill>
-                <a:latin typeface="Karla"/>
+                <a:latin typeface="Calibri"/>
               </a:rPr>
               <a:t>ONE OF THESE</a:t>
             </a:r>
@@ -17554,7 +17554,7 @@
                 <a:solidFill>
                   <a:srgbClr val="FFFDF7"/>
                 </a:solidFill>
-                <a:latin typeface="Karla"/>
+                <a:latin typeface="Calibri"/>
               </a:rPr>
               <a:t>A</a:t>
             </a:r>
@@ -17596,7 +17596,7 @@
                 <a:solidFill>
                   <a:srgbClr val="2E3436"/>
                 </a:solidFill>
-                <a:latin typeface="Karla"/>
+                <a:latin typeface="Calibri"/>
               </a:rPr>
               <a:t>About 10 per cent</a:t>
             </a:r>
@@ -17772,7 +17772,7 @@
                 <a:solidFill>
                   <a:srgbClr val="FFFDF7"/>
                 </a:solidFill>
-                <a:latin typeface="Karla"/>
+                <a:latin typeface="Calibri"/>
               </a:rPr>
               <a:t>B</a:t>
             </a:r>
@@ -17814,7 +17814,7 @@
                 <a:solidFill>
                   <a:srgbClr val="2E3436"/>
                 </a:solidFill>
-                <a:latin typeface="Karla"/>
+                <a:latin typeface="Calibri"/>
               </a:rPr>
               <a:t>About half</a:t>
             </a:r>
@@ -17990,7 +17990,7 @@
                 <a:solidFill>
                   <a:srgbClr val="FFFDF7"/>
                 </a:solidFill>
-                <a:latin typeface="Karla"/>
+                <a:latin typeface="Calibri"/>
               </a:rPr>
               <a:t>C</a:t>
             </a:r>
@@ -18032,7 +18032,7 @@
                 <a:solidFill>
                   <a:srgbClr val="2E3436"/>
                 </a:solidFill>
-                <a:latin typeface="Karla"/>
+                <a:latin typeface="Calibri"/>
               </a:rPr>
               <a:t>All of it</a:t>
             </a:r>
@@ -18074,7 +18074,7 @@
                 <a:solidFill>
                   <a:srgbClr val="5C6552"/>
                 </a:solidFill>
-                <a:latin typeface="Karla"/>
+                <a:latin typeface="Calibri"/>
               </a:rPr>
               <a:t>Agree it as a team, then tick it on the sheet.</a:t>
             </a:r>
@@ -18140,7 +18140,7 @@
                 <a:solidFill>
                   <a:srgbClr val="8B9179"/>
                 </a:solidFill>
-                <a:latin typeface="Karla"/>
+                <a:latin typeface="Calibri"/>
               </a:rPr>
               <a:t>The Pastoral Guide</a:t>
             </a:r>
@@ -18182,7 +18182,7 @@
                 <a:solidFill>
                   <a:srgbClr val="8B9179"/>
                 </a:solidFill>
-                <a:latin typeface="Karla"/>
+                <a:latin typeface="Calibri"/>
               </a:rPr>
               <a:t>8 / 27</a:t>
             </a:r>
@@ -18299,7 +18299,7 @@
                 <a:solidFill>
                   <a:srgbClr val="974F16"/>
                 </a:solidFill>
-                <a:latin typeface="Karla"/>
+                <a:latin typeface="Calibri"/>
               </a:rPr>
               <a:t>ROUND TWO</a:t>
             </a:r>
@@ -18337,11 +18337,11 @@
               </a:spcAft>
             </a:pPr>
             <a:r>
-              <a:rPr sz="4000" b="1" i="0">
+              <a:rPr sz="4000" b="0" i="0">
                 <a:solidFill>
                   <a:srgbClr val="FFFDF7"/>
                 </a:solidFill>
-                <a:latin typeface="Libre Caslon Display"/>
+                <a:latin typeface="Georgia"/>
               </a:rPr>
               <a:t>General knowledge</a:t>
             </a:r>
@@ -18427,7 +18427,7 @@
                 <a:solidFill>
                   <a:srgbClr val="EBCDAE"/>
                 </a:solidFill>
-                <a:latin typeface="Karla"/>
+                <a:latin typeface="Calibri"/>
               </a:rPr>
               <a:t>Four questions to finish. Some have options, and some you will have to write out in full.</a:t>
             </a:r>
@@ -18493,7 +18493,7 @@
                 <a:solidFill>
                   <a:srgbClr val="EBCDAE"/>
                 </a:solidFill>
-                <a:latin typeface="Karla"/>
+                <a:latin typeface="Calibri"/>
               </a:rPr>
               <a:t>The Pastoral Guide</a:t>
             </a:r>
@@ -18535,7 +18535,7 @@
                 <a:solidFill>
                   <a:srgbClr val="EBCDAE"/>
                 </a:solidFill>
-                <a:latin typeface="Karla"/>
+                <a:latin typeface="Calibri"/>
               </a:rPr>
               <a:t>9 / 27</a:t>
             </a:r>
